--- a/fleetana-launch/brand/templates/powerpoint/Fleetana-Template-AR.pptx
+++ b/fleetana-launch/brand/templates/powerpoint/Fleetana-Template-AR.pptx
@@ -122,19 +122,19 @@
   <p:extLst>
     <p:ext uri="{521415D9-36F7-43E2-AB2F-B90AF26B5E84}">
       <p14:sectionLst xmlns:p14="http://schemas.microsoft.com/office/powerpoint/2010/main">
-        <p14:section name="مقدمة" id="{ef91f33f-40a5-9c9e-345c-bb614f395ec5}">
+        <p14:section name="مقدمة" id="{27e63217-9edf-8a7f-f7ad-745376fe4a3e}">
           <p14:sldIdLst>
             <p14:sldId id="256"/>
             <p14:sldId id="257"/>
           </p14:sldIdLst>
         </p14:section>
-        <p14:section name="المشكلة" id="{1309429b-9e57-d842-f38b-d8b9238bcc0e}">
+        <p14:section name="المشكلة" id="{b65e6a2a-158d-881a-8584-c45b6b2eeba8}">
           <p14:sldIdLst>
             <p14:sldId id="258"/>
             <p14:sldId id="259"/>
           </p14:sldIdLst>
         </p14:section>
-        <p14:section name="ما يقدمه فليتانا" id="{46f450fe-f2f0-df0f-a744-93122eef3d8d}">
+        <p14:section name="ما يقدمه فليتانا" id="{3e9096bc-50fb-2870-f120-f29595c9c547}">
           <p14:sldIdLst>
             <p14:sldId id="260"/>
             <p14:sldId id="261"/>
@@ -145,7 +145,7 @@
             <p14:sldId id="266"/>
           </p14:sldIdLst>
         </p14:section>
-        <p14:section name="العرض" id="{5421fc3d-6a0c-38c7-2311-6988fa10f195}">
+        <p14:section name="العرض" id="{a9a7dd45-3d63-9d05-d4c2-d3e0a33f57f2}">
           <p14:sldIdLst>
             <p14:sldId id="267"/>
             <p14:sldId id="268"/>

--- a/fleetana-launch/brand/templates/powerpoint/Fleetana-Template-AR.pptx
+++ b/fleetana-launch/brand/templates/powerpoint/Fleetana-Template-AR.pptx
@@ -122,19 +122,19 @@
   <p:extLst>
     <p:ext uri="{521415D9-36F7-43E2-AB2F-B90AF26B5E84}">
       <p14:sectionLst xmlns:p14="http://schemas.microsoft.com/office/powerpoint/2010/main">
-        <p14:section name="مقدمة" id="{27e63217-9edf-8a7f-f7ad-745376fe4a3e}">
+        <p14:section name="مقدمة" id="{30a8f561-c1fe-0111-255f-b57ee7373532}">
           <p14:sldIdLst>
             <p14:sldId id="256"/>
             <p14:sldId id="257"/>
           </p14:sldIdLst>
         </p14:section>
-        <p14:section name="المشكلة" id="{b65e6a2a-158d-881a-8584-c45b6b2eeba8}">
+        <p14:section name="المشكلة" id="{2c1385f6-794a-b812-e2a2-14404dcb26ea}">
           <p14:sldIdLst>
             <p14:sldId id="258"/>
             <p14:sldId id="259"/>
           </p14:sldIdLst>
         </p14:section>
-        <p14:section name="ما يقدمه فليتانا" id="{3e9096bc-50fb-2870-f120-f29595c9c547}">
+        <p14:section name="ما يقدمه فليتانا" id="{07595d46-7264-2104-8fca-20e57a149a45}">
           <p14:sldIdLst>
             <p14:sldId id="260"/>
             <p14:sldId id="261"/>
@@ -145,7 +145,7 @@
             <p14:sldId id="266"/>
           </p14:sldIdLst>
         </p14:section>
-        <p14:section name="العرض" id="{a9a7dd45-3d63-9d05-d4c2-d3e0a33f57f2}">
+        <p14:section name="العرض" id="{e54dd8ba-e4f7-2598-3127-310a62389f23}">
           <p14:sldIdLst>
             <p14:sldId id="267"/>
             <p14:sldId id="268"/>
@@ -3382,7 +3382,7 @@
           <a:bodyPr wrap="square" lIns="0" tIns="0" rIns="0" bIns="0" rtlCol="0" anchor="t"/>
           <a:lstStyle/>
           <a:p>
-            <a:pPr algn="r" indent="0" marL="0">
+            <a:pPr rtl="1" algn="r" indent="0" marL="0">
               <a:lnSpc>
                 <a:spcPct val="95000"/>
               </a:lnSpc>
@@ -3399,7 +3399,7 @@
             <a:endParaRPr lang="en-US" sz="4800" dirty="0"/>
           </a:p>
           <a:p>
-            <a:pPr algn="r" indent="0" marL="0">
+            <a:pPr rtl="1" algn="r" indent="0" marL="0">
               <a:lnSpc>
                 <a:spcPct val="95000"/>
               </a:lnSpc>
@@ -3639,7 +3639,7 @@
           <a:bodyPr wrap="square" lIns="0" tIns="0" rIns="0" bIns="0" rtlCol="0" anchor="t"/>
           <a:lstStyle/>
           <a:p>
-            <a:pPr algn="r" indent="0" marL="0">
+            <a:pPr rtl="1" algn="r" indent="0" marL="0">
               <a:buNone/>
             </a:pPr>
             <a:r>
@@ -3653,7 +3653,7 @@
             <a:endParaRPr lang="en-US" sz="3200" dirty="0"/>
           </a:p>
           <a:p>
-            <a:pPr algn="r" indent="0" marL="0">
+            <a:pPr rtl="1" algn="r" indent="0" marL="0">
               <a:buNone/>
             </a:pPr>
             <a:r>
@@ -4283,7 +4283,7 @@
           <a:bodyPr wrap="square" lIns="0" tIns="0" rIns="0" bIns="0" rtlCol="0" anchor="t"/>
           <a:lstStyle/>
           <a:p>
-            <a:pPr algn="r" indent="0" marL="0">
+            <a:pPr rtl="1" algn="r" indent="0" marL="0">
               <a:buNone/>
             </a:pPr>
             <a:r>
@@ -4297,7 +4297,7 @@
             <a:endParaRPr lang="en-US" sz="3200" dirty="0"/>
           </a:p>
           <a:p>
-            <a:pPr algn="r" indent="0" marL="0">
+            <a:pPr rtl="1" algn="r" indent="0" marL="0">
               <a:buNone/>
             </a:pPr>
             <a:r>
@@ -5329,7 +5329,7 @@
           <a:bodyPr wrap="square" lIns="0" tIns="0" rIns="0" bIns="0" rtlCol="0" anchor="t"/>
           <a:lstStyle/>
           <a:p>
-            <a:pPr algn="r" indent="0" marL="0">
+            <a:pPr rtl="1" algn="r" indent="0" marL="0">
               <a:buNone/>
             </a:pPr>
             <a:r>
@@ -5343,7 +5343,7 @@
             <a:endParaRPr lang="en-US" sz="3200" dirty="0"/>
           </a:p>
           <a:p>
-            <a:pPr algn="r" indent="0" marL="0">
+            <a:pPr rtl="1" algn="r" indent="0" marL="0">
               <a:buNone/>
             </a:pPr>
             <a:r>
@@ -6921,7 +6921,7 @@
           <a:bodyPr wrap="square" lIns="0" tIns="0" rIns="0" bIns="0" rtlCol="0" anchor="ctr"/>
           <a:lstStyle/>
           <a:p>
-            <a:pPr algn="r" indent="0" marL="0">
+            <a:pPr rtl="1" algn="r" indent="0" marL="0">
               <a:buNone/>
             </a:pPr>
             <a:r>
@@ -6938,7 +6938,7 @@
             <a:endParaRPr lang="en-US" sz="4800" dirty="0"/>
           </a:p>
           <a:p>
-            <a:pPr algn="r" indent="0" marL="0">
+            <a:pPr rtl="1" algn="r" indent="0" marL="0">
               <a:buNone/>
             </a:pPr>
             <a:r>
@@ -7115,7 +7115,7 @@
           <a:bodyPr wrap="square" lIns="0" tIns="0" rIns="0" bIns="0" rtlCol="0" anchor="t"/>
           <a:lstStyle/>
           <a:p>
-            <a:pPr algn="r" indent="0" marL="0">
+            <a:pPr rtl="1" algn="r" indent="0" marL="0">
               <a:buNone/>
             </a:pPr>
             <a:r>
@@ -7129,7 +7129,7 @@
             <a:endParaRPr lang="en-US" sz="3200" dirty="0"/>
           </a:p>
           <a:p>
-            <a:pPr algn="r" indent="0" marL="0">
+            <a:pPr rtl="1" algn="r" indent="0" marL="0">
               <a:buNone/>
             </a:pPr>
             <a:r>
@@ -7873,7 +7873,7 @@
           <a:bodyPr wrap="square" lIns="0" tIns="0" rIns="0" bIns="0" rtlCol="0" anchor="t"/>
           <a:lstStyle/>
           <a:p>
-            <a:pPr algn="r" indent="0" marL="0">
+            <a:pPr rtl="1" algn="r" indent="0" marL="0">
               <a:buNone/>
             </a:pPr>
             <a:r>
@@ -8760,7 +8760,7 @@
           <a:bodyPr wrap="square" lIns="0" tIns="0" rIns="0" bIns="0" rtlCol="0" anchor="t"/>
           <a:lstStyle/>
           <a:p>
-            <a:pPr algn="r" indent="0" marL="0">
+            <a:pPr rtl="1" algn="r" indent="0" marL="0">
               <a:buNone/>
             </a:pPr>
             <a:r>
@@ -8774,7 +8774,7 @@
             <a:endParaRPr lang="en-US" sz="3200" dirty="0"/>
           </a:p>
           <a:p>
-            <a:pPr algn="r" indent="0" marL="0">
+            <a:pPr rtl="1" algn="r" indent="0" marL="0">
               <a:buNone/>
             </a:pPr>
             <a:r>
@@ -9543,7 +9543,7 @@
           <a:bodyPr wrap="square" lIns="0" tIns="0" rIns="0" bIns="0" rtlCol="0" anchor="t"/>
           <a:lstStyle/>
           <a:p>
-            <a:pPr algn="r" indent="0" marL="0">
+            <a:pPr rtl="1" algn="r" indent="0" marL="0">
               <a:buNone/>
             </a:pPr>
             <a:r>
@@ -9557,7 +9557,7 @@
             <a:endParaRPr lang="en-US" sz="3200" dirty="0"/>
           </a:p>
           <a:p>
-            <a:pPr algn="r" indent="0" marL="0">
+            <a:pPr rtl="1" algn="r" indent="0" marL="0">
               <a:buNone/>
             </a:pPr>
             <a:r>
@@ -9817,7 +9817,7 @@
           <a:bodyPr wrap="square" lIns="0" tIns="0" rIns="0" bIns="0" rtlCol="0" anchor="t"/>
           <a:lstStyle/>
           <a:p>
-            <a:pPr algn="r" indent="0" marL="0">
+            <a:pPr rtl="1" algn="r" indent="0" marL="0">
               <a:buNone/>
             </a:pPr>
             <a:r>
@@ -9831,7 +9831,7 @@
             <a:endParaRPr lang="en-US" sz="3200" dirty="0"/>
           </a:p>
           <a:p>
-            <a:pPr algn="r" indent="0" marL="0">
+            <a:pPr rtl="1" algn="r" indent="0" marL="0">
               <a:buNone/>
             </a:pPr>
             <a:r>
@@ -10927,7 +10927,7 @@
           <a:bodyPr wrap="square" lIns="0" tIns="0" rIns="0" bIns="0" rtlCol="0" anchor="t"/>
           <a:lstStyle/>
           <a:p>
-            <a:pPr algn="r" indent="0" marL="0">
+            <a:pPr rtl="1" algn="r" indent="0" marL="0">
               <a:buNone/>
             </a:pPr>
             <a:r>
@@ -10941,7 +10941,7 @@
             <a:endParaRPr lang="en-US" sz="3200" dirty="0"/>
           </a:p>
           <a:p>
-            <a:pPr algn="r" indent="0" marL="0">
+            <a:pPr rtl="1" algn="r" indent="0" marL="0">
               <a:buNone/>
             </a:pPr>
             <a:r>
@@ -11446,7 +11446,7 @@
           <a:bodyPr wrap="square" lIns="0" tIns="0" rIns="0" bIns="0" rtlCol="0" anchor="t"/>
           <a:lstStyle/>
           <a:p>
-            <a:pPr algn="r" indent="0" marL="0">
+            <a:pPr rtl="1" algn="r" indent="0" marL="0">
               <a:buNone/>
             </a:pPr>
             <a:r>
@@ -11460,7 +11460,7 @@
             <a:endParaRPr lang="en-US" sz="3200" dirty="0"/>
           </a:p>
           <a:p>
-            <a:pPr algn="r" indent="0" marL="0">
+            <a:pPr rtl="1" algn="r" indent="0" marL="0">
               <a:buNone/>
             </a:pPr>
             <a:r>

--- a/fleetana-launch/brand/templates/powerpoint/Fleetana-Template-AR.pptx
+++ b/fleetana-launch/brand/templates/powerpoint/Fleetana-Template-AR.pptx
@@ -122,19 +122,19 @@
   <p:extLst>
     <p:ext uri="{521415D9-36F7-43E2-AB2F-B90AF26B5E84}">
       <p14:sectionLst xmlns:p14="http://schemas.microsoft.com/office/powerpoint/2010/main">
-        <p14:section name="مقدمة" id="{30a8f561-c1fe-0111-255f-b57ee7373532}">
+        <p14:section name="مقدمة" id="{d802cbc6-aa47-538b-3cac-7d98e6e95b64}">
           <p14:sldIdLst>
             <p14:sldId id="256"/>
             <p14:sldId id="257"/>
           </p14:sldIdLst>
         </p14:section>
-        <p14:section name="المشكلة" id="{2c1385f6-794a-b812-e2a2-14404dcb26ea}">
+        <p14:section name="المشكلة" id="{b692e718-312c-2f4a-b508-cbbd4ef85780}">
           <p14:sldIdLst>
             <p14:sldId id="258"/>
             <p14:sldId id="259"/>
           </p14:sldIdLst>
         </p14:section>
-        <p14:section name="ما يقدمه فليتانا" id="{07595d46-7264-2104-8fca-20e57a149a45}">
+        <p14:section name="ما يقدمه فليتانا" id="{aa674c6a-8446-1713-f073-c520519c5b7e}">
           <p14:sldIdLst>
             <p14:sldId id="260"/>
             <p14:sldId id="261"/>
@@ -145,7 +145,7 @@
             <p14:sldId id="266"/>
           </p14:sldIdLst>
         </p14:section>
-        <p14:section name="العرض" id="{e54dd8ba-e4f7-2598-3127-310a62389f23}">
+        <p14:section name="العرض" id="{9efb61f1-76a0-0b04-006c-6c01a8a7029d}">
           <p14:sldIdLst>
             <p14:sldId id="267"/>
             <p14:sldId id="268"/>
@@ -1997,7 +1997,7 @@
         </p:blipFill>
         <p:spPr>
           <a:xfrm>
-            <a:off x="8851026" y="548640"/>
+            <a:off x="548640" y="548640"/>
             <a:ext cx="2792029" cy="384048"/>
           </a:xfrm>
           <a:prstGeom prst="rect">
@@ -2222,7 +2222,7 @@
         </p:blipFill>
         <p:spPr>
           <a:xfrm>
-            <a:off x="9914656" y="384048"/>
+            <a:off x="548640" y="384048"/>
             <a:ext cx="1728399" cy="237744"/>
           </a:xfrm>
           <a:prstGeom prst="rect">
@@ -2479,7 +2479,7 @@
         </p:blipFill>
         <p:spPr>
           <a:xfrm>
-            <a:off x="9914656" y="384048"/>
+            <a:off x="548640" y="384048"/>
             <a:ext cx="1728399" cy="237744"/>
           </a:xfrm>
           <a:prstGeom prst="rect">
@@ -2655,7 +2655,7 @@
         </p:blipFill>
         <p:spPr>
           <a:xfrm>
-            <a:off x="9914656" y="384048"/>
+            <a:off x="548640" y="384048"/>
             <a:ext cx="1728399" cy="237744"/>
           </a:xfrm>
           <a:prstGeom prst="rect">
